--- a/experimental-error.pptx
+++ b/experimental-error.pptx
@@ -1066,7 +1066,7 @@
             <a:normAutofit/>
           </a:bodyPr>
           <a:p>
-            <a:pPr algn="ctr" rtl="1"/>
+            <a:pPr algn="ctr"/>
             <a:r>
               <a:rPr lang="en-US" sz="4400" b="0" u="none" strike="noStrike">
                 <a:solidFill>
@@ -1114,7 +1114,7 @@
             <a:normAutofit/>
           </a:bodyPr>
           <a:p>
-            <a:pPr algn="ctr" rtl="1">
+            <a:pPr algn="ctr">
               <a:spcBef>
                 <a:spcPts val="768"/>
               </a:spcBef>
@@ -1263,7 +1263,7 @@
             <a:normAutofit/>
           </a:bodyPr>
           <a:p>
-            <a:pPr algn="ctr" rtl="1"/>
+            <a:pPr algn="ctr"/>
             <a:r>
               <a:rPr lang="en-US" sz="4400" b="0" u="none" strike="noStrike">
                 <a:solidFill>
@@ -1311,7 +1311,7 @@
             <a:normAutofit/>
           </a:bodyPr>
           <a:p>
-            <a:pPr marL="417240" indent="-417240" rtl="1">
+            <a:pPr marL="417240" indent="-417240">
               <a:spcBef>
                 <a:spcPts val="768"/>
               </a:spcBef>
@@ -1319,8 +1319,7 @@
                 <a:srgbClr val="000000"/>
               </a:buClr>
               <a:buSzPct val="45000"/>
-              <a:buFont typeface=""/>
-              <a:buChar char="_x0000_"/>
+              <a:buNone/>
             </a:pPr>
             <a:r>
               <a:rPr lang="en-US" sz="3200" b="0" u="none" strike="noStrike">
@@ -1380,7 +1379,7 @@
             </a:endParaRPr>
           </a:p>
           <a:p>
-            <a:pPr marL="822960" lvl="1" indent="-365760" rtl="1">
+            <a:pPr marL="822960" lvl="1" indent="-365760">
               <a:spcBef>
                 <a:spcPts val="672"/>
               </a:spcBef>
@@ -1388,8 +1387,7 @@
                 <a:srgbClr val="000000"/>
               </a:buClr>
               <a:buSzPct val="45000"/>
-              <a:buFont typeface=""/>
-              <a:buChar char="_x0000_"/>
+              <a:buNone/>
             </a:pPr>
             <a:r>
               <a:rPr lang="en-US" sz="2800" b="0" u="none" strike="noStrike">
@@ -1413,7 +1411,7 @@
             </a:endParaRPr>
           </a:p>
           <a:p>
-            <a:pPr marL="822960" lvl="1" indent="-365760" rtl="1">
+            <a:pPr marL="822960" lvl="1" indent="-365760">
               <a:spcBef>
                 <a:spcPts val="672"/>
               </a:spcBef>
@@ -1421,8 +1419,7 @@
                 <a:srgbClr val="000000"/>
               </a:buClr>
               <a:buSzPct val="45000"/>
-              <a:buFont typeface=""/>
-              <a:buChar char="_x0000_"/>
+              <a:buNone/>
             </a:pPr>
             <a:r>
               <a:rPr lang="en-US" sz="2800" b="0" u="none" strike="noStrike">
@@ -1508,7 +1505,7 @@
             <a:normAutofit/>
           </a:bodyPr>
           <a:p>
-            <a:pPr algn="ctr" rtl="1"/>
+            <a:pPr algn="ctr"/>
             <a:r>
               <a:rPr lang="en-US" sz="4400" b="0" u="none" strike="noStrike">
                 <a:solidFill>
@@ -1556,7 +1553,7 @@
             <a:normAutofit/>
           </a:bodyPr>
           <a:p>
-            <a:pPr marL="417240" indent="-417240" rtl="1">
+            <a:pPr marL="417240" indent="-417240">
               <a:spcBef>
                 <a:spcPts val="768"/>
               </a:spcBef>
@@ -1564,8 +1561,7 @@
                 <a:srgbClr val="000000"/>
               </a:buClr>
               <a:buSzPct val="45000"/>
-              <a:buFont typeface=""/>
-              <a:buChar char="_x0000_"/>
+              <a:buNone/>
             </a:pPr>
             <a:r>
               <a:rPr lang="en-US" sz="3200" b="0" u="none" strike="noStrike">
@@ -1589,7 +1585,7 @@
             </a:endParaRPr>
           </a:p>
           <a:p>
-            <a:pPr marL="417240" indent="-417240" rtl="1">
+            <a:pPr marL="417240" indent="-417240">
               <a:spcBef>
                 <a:spcPts val="768"/>
               </a:spcBef>
@@ -1597,8 +1593,7 @@
                 <a:srgbClr val="000000"/>
               </a:buClr>
               <a:buSzPct val="45000"/>
-              <a:buFont typeface=""/>
-              <a:buChar char="_x0000_"/>
+              <a:buNone/>
             </a:pPr>
             <a:r>
               <a:rPr lang="en-US" sz="1800" b="0" u="none" strike="noStrike">
@@ -1621,7 +1616,7 @@
             </a:endParaRPr>
           </a:p>
           <a:p>
-            <a:pPr marL="417240" indent="-417240" rtl="1">
+            <a:pPr marL="417240" indent="-417240">
               <a:spcBef>
                 <a:spcPts val="768"/>
               </a:spcBef>
@@ -1629,8 +1624,7 @@
                 <a:srgbClr val="000000"/>
               </a:buClr>
               <a:buSzPct val="45000"/>
-              <a:buFont typeface=""/>
-              <a:buChar char="_x0000_"/>
+              <a:buNone/>
             </a:pPr>
             <a:r>
               <a:rPr lang="en-US" sz="1800" b="0" u="none" strike="noStrike">
@@ -1653,7 +1647,7 @@
             </a:endParaRPr>
           </a:p>
           <a:p>
-            <a:pPr marL="417240" indent="-417240" rtl="1">
+            <a:pPr marL="417240" indent="-417240">
               <a:spcBef>
                 <a:spcPts val="768"/>
               </a:spcBef>
@@ -1661,8 +1655,7 @@
                 <a:srgbClr val="000000"/>
               </a:buClr>
               <a:buSzPct val="45000"/>
-              <a:buFont typeface=""/>
-              <a:buChar char="_x0000_"/>
+              <a:buNone/>
             </a:pPr>
             <a:r>
               <a:rPr lang="en-US" sz="1800" b="0" u="none" strike="noStrike">
@@ -1685,7 +1678,7 @@
             </a:endParaRPr>
           </a:p>
           <a:p>
-            <a:pPr marL="417240" indent="-417240" rtl="1">
+            <a:pPr marL="417240" indent="-417240">
               <a:spcBef>
                 <a:spcPts val="768"/>
               </a:spcBef>
@@ -1693,8 +1686,7 @@
                 <a:srgbClr val="000000"/>
               </a:buClr>
               <a:buSzPct val="45000"/>
-              <a:buFont typeface=""/>
-              <a:buChar char="_x0000_"/>
+              <a:buNone/>
             </a:pPr>
             <a:r>
               <a:rPr lang="en-US" sz="1800" b="0" u="none" strike="noStrike">
@@ -1717,7 +1709,7 @@
             </a:endParaRPr>
           </a:p>
           <a:p>
-            <a:pPr marL="417240" indent="-417240" rtl="1">
+            <a:pPr marL="417240" indent="-417240">
               <a:spcBef>
                 <a:spcPts val="768"/>
               </a:spcBef>
@@ -1725,8 +1717,7 @@
                 <a:srgbClr val="000000"/>
               </a:buClr>
               <a:buSzPct val="45000"/>
-              <a:buFont typeface=""/>
-              <a:buChar char="_x0000_"/>
+              <a:buNone/>
             </a:pPr>
             <a:r>
               <a:rPr lang="en-US" sz="3200" b="0" u="none" strike="noStrike">
@@ -1848,7 +1839,7 @@
             <a:normAutofit/>
           </a:bodyPr>
           <a:p>
-            <a:pPr algn="ctr" rtl="1"/>
+            <a:pPr algn="ctr"/>
             <a:r>
               <a:rPr lang="en-US" sz="4400" b="0" u="none" strike="noStrike">
                 <a:solidFill>
@@ -2012,7 +2003,7 @@
               <a:spAutoFit/>
             </a:bodyPr>
             <a:p>
-              <a:pPr algn="ctr" rtl="1"/>
+              <a:pPr algn="ctr"/>
               <a:r>
                 <a:rPr lang="en-US" sz="1200" b="0" u="none" strike="noStrike">
                   <a:solidFill>
@@ -2178,7 +2169,7 @@
               <a:spAutoFit/>
             </a:bodyPr>
             <a:p>
-              <a:pPr algn="ctr" rtl="1"/>
+              <a:pPr algn="ctr"/>
               <a:r>
                 <a:rPr lang="en-US" sz="1800" b="0" u="none" strike="noStrike">
                   <a:solidFill>
@@ -2340,7 +2331,7 @@
               <a:spAutoFit/>
             </a:bodyPr>
             <a:p>
-              <a:pPr algn="ctr" rtl="1"/>
+              <a:pPr algn="ctr"/>
               <a:r>
                 <a:rPr lang="en-US" sz="1600" b="0" u="none" strike="noStrike">
                   <a:solidFill>
@@ -2634,7 +2625,7 @@
             <a:normAutofit/>
           </a:bodyPr>
           <a:p>
-            <a:pPr algn="ctr" rtl="1"/>
+            <a:pPr algn="ctr"/>
             <a:r>
               <a:rPr lang="en-US" sz="4400" b="0" u="none" strike="noStrike">
                 <a:solidFill>
@@ -2694,7 +2685,7 @@
             <a:normAutofit/>
           </a:bodyPr>
           <a:p>
-            <a:pPr marL="417240" indent="-417240" rtl="1">
+            <a:pPr marL="417240" indent="-417240">
               <a:spcBef>
                 <a:spcPts val="768"/>
               </a:spcBef>
@@ -2702,8 +2693,7 @@
                 <a:srgbClr val="000000"/>
               </a:buClr>
               <a:buSzPct val="45000"/>
-              <a:buFont typeface=""/>
-              <a:buChar char="_x0000_"/>
+              <a:buNone/>
             </a:pPr>
             <a:r>
               <a:rPr lang="en-US" sz="3200" b="0" u="none" strike="noStrike">
@@ -2727,7 +2717,7 @@
             </a:endParaRPr>
           </a:p>
           <a:p>
-            <a:pPr marL="822960" lvl="1" indent="-365760" rtl="1">
+            <a:pPr marL="822960" lvl="1" indent="-365760">
               <a:spcBef>
                 <a:spcPts val="672"/>
               </a:spcBef>
@@ -2735,8 +2725,7 @@
                 <a:srgbClr val="000000"/>
               </a:buClr>
               <a:buSzPct val="45000"/>
-              <a:buFont typeface=""/>
-              <a:buChar char="_x0000_"/>
+              <a:buNone/>
             </a:pPr>
             <a:r>
               <a:rPr lang="en-US" sz="2800" b="0" u="none" strike="noStrike">
@@ -2772,7 +2761,7 @@
             </a:endParaRPr>
           </a:p>
           <a:p>
-            <a:pPr marL="1278000" lvl="2" indent="-363600" rtl="1">
+            <a:pPr marL="1278000" lvl="2" indent="-363600">
               <a:spcBef>
                 <a:spcPts val="672"/>
               </a:spcBef>
@@ -2780,8 +2769,7 @@
                 <a:srgbClr val="000000"/>
               </a:buClr>
               <a:buSzPct val="45000"/>
-              <a:buFont typeface=""/>
-              <a:buChar char="_x0000_"/>
+              <a:buNone/>
             </a:pPr>
             <a:r>
               <a:rPr lang="en-US" sz="2800" b="0" u="none" strike="noStrike">
@@ -2829,7 +2817,7 @@
             </a:endParaRPr>
           </a:p>
           <a:p>
-            <a:pPr marL="822960" lvl="1" indent="-365760" rtl="1">
+            <a:pPr marL="822960" lvl="1" indent="-365760">
               <a:spcBef>
                 <a:spcPts val="672"/>
               </a:spcBef>
@@ -2837,8 +2825,7 @@
                 <a:srgbClr val="000000"/>
               </a:buClr>
               <a:buSzPct val="45000"/>
-              <a:buFont typeface=""/>
-              <a:buChar char="_x0000_"/>
+              <a:buNone/>
             </a:pPr>
             <a:r>
               <a:rPr lang="en-US" sz="1800" b="0" u="none" strike="noStrike">
@@ -2861,7 +2848,7 @@
             </a:endParaRPr>
           </a:p>
           <a:p>
-            <a:pPr marL="417240" indent="-417240" rtl="1">
+            <a:pPr marL="417240" indent="-417240">
               <a:spcBef>
                 <a:spcPts val="768"/>
               </a:spcBef>
@@ -2869,8 +2856,7 @@
                 <a:srgbClr val="000000"/>
               </a:buClr>
               <a:buSzPct val="45000"/>
-              <a:buFont typeface=""/>
-              <a:buChar char="_x0000_"/>
+              <a:buNone/>
             </a:pPr>
             <a:r>
               <a:rPr lang="en-US" sz="3200" b="0" u="none" strike="noStrike">
@@ -2906,7 +2892,7 @@
             </a:endParaRPr>
           </a:p>
           <a:p>
-            <a:pPr marL="822960" lvl="1" indent="-365760" rtl="1">
+            <a:pPr marL="822960" lvl="1" indent="-365760">
               <a:spcBef>
                 <a:spcPts val="672"/>
               </a:spcBef>
@@ -2914,8 +2900,7 @@
                 <a:srgbClr val="000000"/>
               </a:buClr>
               <a:buSzPct val="45000"/>
-              <a:buFont typeface=""/>
-              <a:buChar char="_x0000_"/>
+              <a:buNone/>
             </a:pPr>
             <a:r>
               <a:rPr lang="en-US" sz="2800" b="0" u="none" strike="noStrike">
@@ -2951,7 +2936,7 @@
             </a:endParaRPr>
           </a:p>
           <a:p>
-            <a:pPr marL="1278000" lvl="2" indent="-363600" rtl="1">
+            <a:pPr marL="1278000" lvl="2" indent="-363600">
               <a:spcBef>
                 <a:spcPts val="575"/>
               </a:spcBef>
@@ -2959,8 +2944,7 @@
                 <a:srgbClr val="000000"/>
               </a:buClr>
               <a:buSzPct val="45000"/>
-              <a:buFont typeface=""/>
-              <a:buChar char="_x0000_"/>
+              <a:buNone/>
             </a:pPr>
             <a:r>
               <a:rPr lang="en-US" sz="2400" b="0" u="none" strike="noStrike">
@@ -3141,7 +3125,7 @@
               <a:spAutoFit/>
             </a:bodyPr>
             <a:p>
-              <a:pPr algn="ctr" rtl="1"/>
+              <a:pPr algn="ctr"/>
               <a:r>
                 <a:rPr lang="en-US" sz="1800" b="0" u="none" strike="noStrike">
                   <a:solidFill>
@@ -3239,7 +3223,7 @@
             <a:normAutofit/>
           </a:bodyPr>
           <a:p>
-            <a:pPr algn="ctr" rtl="1"/>
+            <a:pPr algn="ctr"/>
             <a:r>
               <a:rPr lang="en-US" sz="4400" b="0" u="none" strike="noStrike">
                 <a:solidFill>
@@ -3287,7 +3271,7 @@
             <a:normAutofit/>
           </a:bodyPr>
           <a:p>
-            <a:pPr marL="367920" indent="-367920" rtl="1">
+            <a:pPr marL="367920" indent="-367920">
               <a:lnSpc>
                 <a:spcPct val="80000"/>
               </a:lnSpc>
@@ -3298,8 +3282,7 @@
                 <a:srgbClr val="000000"/>
               </a:buClr>
               <a:buSzPct val="45000"/>
-              <a:buFont typeface=""/>
-              <a:buChar char="_x0000_"/>
+              <a:buNone/>
             </a:pPr>
             <a:r>
               <a:rPr lang="en-US" sz="2800" b="0" u="none" strike="noStrike">
@@ -3323,7 +3306,7 @@
             </a:endParaRPr>
           </a:p>
           <a:p>
-            <a:pPr marL="822960" lvl="1" indent="-365760" rtl="1">
+            <a:pPr marL="822960" lvl="1" indent="-365760">
               <a:lnSpc>
                 <a:spcPct val="80000"/>
               </a:lnSpc>
@@ -3334,8 +3317,7 @@
                 <a:srgbClr val="000000"/>
               </a:buClr>
               <a:buSzPct val="45000"/>
-              <a:buFont typeface=""/>
-              <a:buChar char="_x0000_"/>
+              <a:buNone/>
             </a:pPr>
             <a:r>
               <a:rPr lang="en-US" sz="2800" b="0" u="none" strike="noStrike">
@@ -3371,7 +3353,7 @@
             </a:endParaRPr>
           </a:p>
           <a:p>
-            <a:pPr marL="1278000" lvl="2" indent="-363600" rtl="1">
+            <a:pPr marL="1278000" lvl="2" indent="-363600">
               <a:lnSpc>
                 <a:spcPct val="80000"/>
               </a:lnSpc>
@@ -3382,8 +3364,7 @@
                 <a:srgbClr val="000000"/>
               </a:buClr>
               <a:buSzPct val="45000"/>
-              <a:buFont typeface=""/>
-              <a:buChar char="_x0000_"/>
+              <a:buNone/>
             </a:pPr>
             <a:r>
               <a:rPr lang="en-US" sz="2800" b="0" u="none" strike="noStrike">
@@ -3407,7 +3388,7 @@
             </a:endParaRPr>
           </a:p>
           <a:p>
-            <a:pPr marL="822960" lvl="1" indent="-365760" rtl="1">
+            <a:pPr marL="822960" lvl="1" indent="-365760">
               <a:lnSpc>
                 <a:spcPct val="80000"/>
               </a:lnSpc>
@@ -3418,8 +3399,7 @@
                 <a:srgbClr val="000000"/>
               </a:buClr>
               <a:buSzPct val="45000"/>
-              <a:buFont typeface=""/>
-              <a:buChar char="_x0000_"/>
+              <a:buNone/>
             </a:pPr>
             <a:r>
               <a:rPr lang="en-US" sz="2800" b="0" u="none" strike="noStrike">
@@ -3455,7 +3435,7 @@
             </a:endParaRPr>
           </a:p>
           <a:p>
-            <a:pPr marL="822960" lvl="1" indent="-365760" rtl="1">
+            <a:pPr marL="822960" lvl="1" indent="-365760">
               <a:lnSpc>
                 <a:spcPct val="80000"/>
               </a:lnSpc>
@@ -3466,8 +3446,7 @@
                 <a:srgbClr val="000000"/>
               </a:buClr>
               <a:buSzPct val="45000"/>
-              <a:buFont typeface=""/>
-              <a:buChar char="_x0000_"/>
+              <a:buNone/>
             </a:pPr>
             <a:r>
               <a:rPr lang="en-US" sz="1800" b="0" u="none" strike="noStrike">
@@ -3490,7 +3469,7 @@
             </a:endParaRPr>
           </a:p>
           <a:p>
-            <a:pPr marL="367920" indent="-367920" rtl="1">
+            <a:pPr marL="367920" indent="-367920">
               <a:lnSpc>
                 <a:spcPct val="80000"/>
               </a:lnSpc>
@@ -3501,8 +3480,7 @@
                 <a:srgbClr val="000000"/>
               </a:buClr>
               <a:buSzPct val="45000"/>
-              <a:buFont typeface=""/>
-              <a:buChar char="_x0000_"/>
+              <a:buNone/>
             </a:pPr>
             <a:r>
               <a:rPr lang="en-US" sz="2800" b="0" u="none" strike="noStrike">
@@ -3538,7 +3516,7 @@
             </a:endParaRPr>
           </a:p>
           <a:p>
-            <a:pPr marL="822960" lvl="1" indent="-365760" rtl="1">
+            <a:pPr marL="822960" lvl="1" indent="-365760">
               <a:lnSpc>
                 <a:spcPct val="80000"/>
               </a:lnSpc>
@@ -3549,8 +3527,7 @@
                 <a:srgbClr val="000000"/>
               </a:buClr>
               <a:buSzPct val="45000"/>
-              <a:buFont typeface=""/>
-              <a:buChar char="_x0000_"/>
+              <a:buNone/>
             </a:pPr>
             <a:r>
               <a:rPr lang="en-US" sz="2800" b="0" u="none" strike="noStrike">
@@ -3586,7 +3563,7 @@
             </a:endParaRPr>
           </a:p>
           <a:p>
-            <a:pPr marL="1278000" lvl="2" indent="-363600" rtl="1">
+            <a:pPr marL="1278000" lvl="2" indent="-363600">
               <a:lnSpc>
                 <a:spcPct val="80000"/>
               </a:lnSpc>
@@ -3597,8 +3574,7 @@
                 <a:srgbClr val="000000"/>
               </a:buClr>
               <a:buSzPct val="45000"/>
-              <a:buFont typeface=""/>
-              <a:buChar char="_x0000_"/>
+              <a:buNone/>
             </a:pPr>
             <a:r>
               <a:rPr lang="en-US" sz="2800" b="0" u="none" strike="noStrike">
@@ -3622,7 +3598,7 @@
             </a:endParaRPr>
           </a:p>
           <a:p>
-            <a:pPr marL="822960" lvl="1" indent="-365760" rtl="1">
+            <a:pPr marL="822960" lvl="1" indent="-365760">
               <a:lnSpc>
                 <a:spcPct val="80000"/>
               </a:lnSpc>
@@ -3633,8 +3609,7 @@
                 <a:srgbClr val="000000"/>
               </a:buClr>
               <a:buSzPct val="45000"/>
-              <a:buFont typeface=""/>
-              <a:buChar char="_x0000_"/>
+              <a:buNone/>
             </a:pPr>
             <a:r>
               <a:rPr lang="en-US" sz="2800" b="0" u="none" strike="noStrike">
@@ -3800,7 +3775,7 @@
             <a:normAutofit/>
           </a:bodyPr>
           <a:p>
-            <a:pPr algn="ctr" rtl="1"/>
+            <a:pPr algn="ctr"/>
             <a:r>
               <a:rPr lang="en-US" sz="4400" b="0" u="none" strike="noStrike">
                 <a:solidFill>
@@ -3848,7 +3823,7 @@
             <a:normAutofit/>
           </a:bodyPr>
           <a:p>
-            <a:pPr marL="417240" indent="-417240" rtl="1">
+            <a:pPr marL="417240" indent="-417240">
               <a:lnSpc>
                 <a:spcPct val="150000"/>
               </a:lnSpc>
@@ -3859,8 +3834,7 @@
                 <a:srgbClr val="000000"/>
               </a:buClr>
               <a:buSzPct val="45000"/>
-              <a:buFont typeface=""/>
-              <a:buChar char="_x0000_"/>
+              <a:buNone/>
             </a:pPr>
             <a:r>
               <a:rPr lang="en-US" sz="3200" b="0" u="none" strike="noStrike">
@@ -3896,7 +3870,7 @@
             </a:endParaRPr>
           </a:p>
           <a:p>
-            <a:pPr marL="417240" indent="-417240" rtl="1">
+            <a:pPr marL="417240" indent="-417240">
               <a:lnSpc>
                 <a:spcPct val="150000"/>
               </a:lnSpc>
@@ -3907,8 +3881,7 @@
                 <a:srgbClr val="000000"/>
               </a:buClr>
               <a:buSzPct val="45000"/>
-              <a:buFont typeface=""/>
-              <a:buChar char="_x0000_"/>
+              <a:buNone/>
             </a:pPr>
             <a:r>
               <a:rPr lang="en-US" sz="3200" b="0" u="none" strike="noStrike">
@@ -3944,7 +3917,7 @@
             </a:endParaRPr>
           </a:p>
           <a:p>
-            <a:pPr marL="417240" indent="-417240" rtl="1">
+            <a:pPr marL="417240" indent="-417240">
               <a:lnSpc>
                 <a:spcPct val="150000"/>
               </a:lnSpc>
@@ -3955,8 +3928,7 @@
                 <a:srgbClr val="000000"/>
               </a:buClr>
               <a:buSzPct val="45000"/>
-              <a:buFont typeface=""/>
-              <a:buChar char="_x0000_"/>
+              <a:buNone/>
             </a:pPr>
             <a:r>
               <a:rPr lang="en-US" sz="3200" b="0" u="none" strike="noStrike">
@@ -4054,7 +4026,7 @@
             <a:normAutofit/>
           </a:bodyPr>
           <a:p>
-            <a:pPr algn="ctr" rtl="1"/>
+            <a:pPr algn="ctr"/>
             <a:r>
               <a:rPr lang="en-US" sz="4400" b="0" u="none" strike="noStrike">
                 <a:solidFill>
@@ -4102,7 +4074,7 @@
             <a:normAutofit/>
           </a:bodyPr>
           <a:p>
-            <a:pPr marL="417240" indent="-417240" rtl="1">
+            <a:pPr marL="417240" indent="-417240">
               <a:lnSpc>
                 <a:spcPct val="135000"/>
               </a:lnSpc>
@@ -4113,8 +4085,7 @@
                 <a:srgbClr val="000000"/>
               </a:buClr>
               <a:buSzPct val="45000"/>
-              <a:buFont typeface=""/>
-              <a:buChar char="_x0000_"/>
+              <a:buNone/>
             </a:pPr>
             <a:r>
               <a:rPr lang="en-US" sz="3200" b="0" u="none" strike="noStrike">
@@ -4138,7 +4109,7 @@
             </a:endParaRPr>
           </a:p>
           <a:p>
-            <a:pPr marL="417240" indent="-417240" rtl="1">
+            <a:pPr marL="417240" indent="-417240">
               <a:lnSpc>
                 <a:spcPct val="135000"/>
               </a:lnSpc>
@@ -4149,8 +4120,7 @@
                 <a:srgbClr val="000000"/>
               </a:buClr>
               <a:buSzPct val="45000"/>
-              <a:buFont typeface=""/>
-              <a:buChar char="_x0000_"/>
+              <a:buNone/>
             </a:pPr>
             <a:r>
               <a:rPr lang="en-US" sz="3200" b="0" u="none" strike="noStrike">
@@ -4174,7 +4144,7 @@
             </a:endParaRPr>
           </a:p>
           <a:p>
-            <a:pPr marL="417240" indent="-417240" rtl="1">
+            <a:pPr marL="417240" indent="-417240">
               <a:lnSpc>
                 <a:spcPct val="135000"/>
               </a:lnSpc>
@@ -4185,8 +4155,7 @@
                 <a:srgbClr val="000000"/>
               </a:buClr>
               <a:buSzPct val="45000"/>
-              <a:buFont typeface=""/>
-              <a:buChar char="_x0000_"/>
+              <a:buNone/>
             </a:pPr>
             <a:r>
               <a:rPr lang="en-US" sz="3200" b="0" u="none" strike="noStrike">
@@ -4272,7 +4241,7 @@
             <a:normAutofit/>
           </a:bodyPr>
           <a:p>
-            <a:pPr algn="ctr" rtl="1"/>
+            <a:pPr algn="ctr"/>
             <a:r>
               <a:rPr lang="en-US" sz="4400" b="0" u="none" strike="noStrike">
                 <a:solidFill>
@@ -5087,7 +5056,7 @@
             <a:normAutofit/>
           </a:bodyPr>
           <a:p>
-            <a:pPr algn="ctr" rtl="1"/>
+            <a:pPr algn="ctr"/>
             <a:r>
               <a:rPr lang="en-US" sz="4400" b="0" u="none" strike="noStrike">
                 <a:solidFill>
@@ -5135,7 +5104,7 @@
             <a:normAutofit/>
           </a:bodyPr>
           <a:p>
-            <a:pPr marL="380160" indent="-380160" rtl="1">
+            <a:pPr marL="380160" indent="-380160">
               <a:lnSpc>
                 <a:spcPct val="135000"/>
               </a:lnSpc>
@@ -5146,8 +5115,7 @@
                 <a:srgbClr val="000000"/>
               </a:buClr>
               <a:buSzPct val="45000"/>
-              <a:buFont typeface=""/>
-              <a:buChar char="_x0000_"/>
+              <a:buNone/>
             </a:pPr>
             <a:r>
               <a:rPr lang="en-US" sz="2900" b="0" u="none" strike="noStrike">
@@ -5171,7 +5139,7 @@
             </a:endParaRPr>
           </a:p>
           <a:p>
-            <a:pPr marL="380160" indent="-380160" rtl="1">
+            <a:pPr marL="380160" indent="-380160">
               <a:lnSpc>
                 <a:spcPct val="135000"/>
               </a:lnSpc>
@@ -5182,8 +5150,7 @@
                 <a:srgbClr val="000000"/>
               </a:buClr>
               <a:buSzPct val="45000"/>
-              <a:buFont typeface=""/>
-              <a:buChar char="_x0000_"/>
+              <a:buNone/>
             </a:pPr>
             <a:r>
               <a:rPr lang="en-US" sz="2900" b="0" u="none" strike="noStrike">
@@ -5207,7 +5174,7 @@
             </a:endParaRPr>
           </a:p>
           <a:p>
-            <a:pPr marL="380160" indent="-380160" rtl="1">
+            <a:pPr marL="380160" indent="-380160">
               <a:lnSpc>
                 <a:spcPct val="135000"/>
               </a:lnSpc>
@@ -5218,8 +5185,7 @@
                 <a:srgbClr val="000000"/>
               </a:buClr>
               <a:buSzPct val="45000"/>
-              <a:buFont typeface=""/>
-              <a:buChar char="_x0000_"/>
+              <a:buNone/>
             </a:pPr>
             <a:r>
               <a:rPr lang="en-US" sz="2900" b="0" u="none" strike="noStrike">
@@ -5243,7 +5209,7 @@
             </a:endParaRPr>
           </a:p>
           <a:p>
-            <a:pPr marL="380160" indent="-380160" rtl="1">
+            <a:pPr marL="380160" indent="-380160">
               <a:lnSpc>
                 <a:spcPct val="135000"/>
               </a:lnSpc>
@@ -5254,8 +5220,7 @@
                 <a:srgbClr val="000000"/>
               </a:buClr>
               <a:buSzPct val="45000"/>
-              <a:buFont typeface=""/>
-              <a:buChar char="_x0000_"/>
+              <a:buNone/>
             </a:pPr>
             <a:r>
               <a:rPr lang="en-US" sz="2900" b="0" u="none" strike="noStrike">
@@ -5279,7 +5244,7 @@
             </a:endParaRPr>
           </a:p>
           <a:p>
-            <a:pPr marL="380160" indent="-380160" rtl="1">
+            <a:pPr marL="380160" indent="-380160">
               <a:lnSpc>
                 <a:spcPct val="135000"/>
               </a:lnSpc>
@@ -5290,8 +5255,7 @@
                 <a:srgbClr val="000000"/>
               </a:buClr>
               <a:buSzPct val="45000"/>
-              <a:buFont typeface=""/>
-              <a:buChar char="_x0000_"/>
+              <a:buNone/>
             </a:pPr>
             <a:r>
               <a:rPr lang="en-US" sz="2900" b="0" u="none" strike="noStrike">
@@ -5377,7 +5341,7 @@
             <a:normAutofit/>
           </a:bodyPr>
           <a:p>
-            <a:pPr algn="ctr" rtl="1"/>
+            <a:pPr algn="ctr"/>
             <a:r>
               <a:rPr lang="en-US" sz="4400" b="0" u="none" strike="noStrike">
                 <a:solidFill>
@@ -5425,7 +5389,7 @@
             <a:normAutofit/>
           </a:bodyPr>
           <a:p>
-            <a:pPr marL="417240" indent="-417240" rtl="1">
+            <a:pPr marL="417240" indent="-417240">
               <a:spcBef>
                 <a:spcPts val="768"/>
               </a:spcBef>
@@ -5433,8 +5397,7 @@
                 <a:srgbClr val="000000"/>
               </a:buClr>
               <a:buSzPct val="45000"/>
-              <a:buFont typeface=""/>
-              <a:buChar char="_x0000_"/>
+              <a:buNone/>
             </a:pPr>
             <a:r>
               <a:rPr lang="en-US" sz="3200" b="0" u="none" strike="noStrike">
@@ -5470,7 +5433,7 @@
             </a:endParaRPr>
           </a:p>
           <a:p>
-            <a:pPr marL="822960" lvl="1" indent="-365760" rtl="1">
+            <a:pPr marL="822960" lvl="1" indent="-365760">
               <a:spcBef>
                 <a:spcPts val="672"/>
               </a:spcBef>
@@ -5478,8 +5441,7 @@
                 <a:srgbClr val="000000"/>
               </a:buClr>
               <a:buSzPct val="45000"/>
-              <a:buFont typeface=""/>
-              <a:buChar char="_x0000_"/>
+              <a:buNone/>
             </a:pPr>
             <a:r>
               <a:rPr lang="en-US" sz="2800" b="0" u="none" strike="noStrike">
@@ -5503,7 +5465,7 @@
             </a:endParaRPr>
           </a:p>
           <a:p>
-            <a:pPr marL="822960" lvl="1" indent="-365760" rtl="1">
+            <a:pPr marL="822960" lvl="1" indent="-365760">
               <a:spcBef>
                 <a:spcPts val="672"/>
               </a:spcBef>
@@ -5511,8 +5473,7 @@
                 <a:srgbClr val="000000"/>
               </a:buClr>
               <a:buSzPct val="45000"/>
-              <a:buFont typeface=""/>
-              <a:buChar char="_x0000_"/>
+              <a:buNone/>
             </a:pPr>
             <a:r>
               <a:rPr lang="en-US" sz="2800" b="0" u="none" strike="noStrike">
@@ -5536,7 +5497,7 @@
             </a:endParaRPr>
           </a:p>
           <a:p>
-            <a:pPr marL="1228680" lvl="2" indent="-314280" rtl="1">
+            <a:pPr marL="1228680" lvl="2" indent="-314280">
               <a:spcBef>
                 <a:spcPts val="575"/>
               </a:spcBef>
@@ -5544,8 +5505,7 @@
                 <a:srgbClr val="000000"/>
               </a:buClr>
               <a:buSzPct val="45000"/>
-              <a:buFont typeface=""/>
-              <a:buChar char="_x0000_"/>
+              <a:buNone/>
             </a:pPr>
             <a:r>
               <a:rPr lang="en-US" sz="2400" b="0" u="none" strike="noStrike">
@@ -5569,7 +5529,7 @@
             </a:endParaRPr>
           </a:p>
           <a:p>
-            <a:pPr marL="1228680" lvl="2" indent="-314280" rtl="1">
+            <a:pPr marL="1228680" lvl="2" indent="-314280">
               <a:spcBef>
                 <a:spcPts val="575"/>
               </a:spcBef>
@@ -5577,8 +5537,7 @@
                 <a:srgbClr val="000000"/>
               </a:buClr>
               <a:buSzPct val="45000"/>
-              <a:buFont typeface=""/>
-              <a:buChar char="_x0000_"/>
+              <a:buNone/>
             </a:pPr>
             <a:r>
               <a:rPr lang="en-US" sz="2400" b="0" u="none" strike="noStrike">
@@ -5700,7 +5659,7 @@
             <a:normAutofit/>
           </a:bodyPr>
           <a:p>
-            <a:pPr algn="ctr" rtl="1"/>
+            <a:pPr algn="ctr"/>
             <a:r>
               <a:rPr lang="en-US" sz="4400" b="0" u="none" strike="noStrike">
                 <a:solidFill>
@@ -5748,7 +5707,7 @@
             <a:normAutofit/>
           </a:bodyPr>
           <a:p>
-            <a:pPr marL="417240" indent="-417240" rtl="1">
+            <a:pPr marL="417240" indent="-417240">
               <a:spcBef>
                 <a:spcPts val="768"/>
               </a:spcBef>
@@ -5756,8 +5715,7 @@
                 <a:srgbClr val="000000"/>
               </a:buClr>
               <a:buSzPct val="45000"/>
-              <a:buFont typeface=""/>
-              <a:buChar char="_x0000_"/>
+              <a:buNone/>
             </a:pPr>
             <a:r>
               <a:rPr lang="en-US" sz="3200" b="0" u="none" strike="noStrike">
@@ -5791,7 +5749,7 @@
             </a:endParaRPr>
           </a:p>
           <a:p>
-            <a:pPr marL="417240" indent="-417240" rtl="1">
+            <a:pPr marL="417240" indent="-417240">
               <a:spcBef>
                 <a:spcPts val="768"/>
               </a:spcBef>
@@ -5799,8 +5757,7 @@
                 <a:srgbClr val="000000"/>
               </a:buClr>
               <a:buSzPct val="45000"/>
-              <a:buFont typeface=""/>
-              <a:buChar char="_x0000_"/>
+              <a:buNone/>
             </a:pPr>
             <a:r>
               <a:rPr lang="en-US" sz="3200" b="0" u="none" strike="noStrike">
@@ -5947,7 +5904,7 @@
             <a:normAutofit/>
           </a:bodyPr>
           <a:p>
-            <a:pPr algn="ctr" rtl="1"/>
+            <a:pPr algn="ctr"/>
             <a:r>
               <a:rPr lang="en-US" sz="4400" b="0" u="none" strike="noStrike">
                 <a:solidFill>
@@ -5995,7 +5952,7 @@
             <a:normAutofit/>
           </a:bodyPr>
           <a:p>
-            <a:pPr marL="417240" indent="-417240" rtl="1">
+            <a:pPr marL="417240" indent="-417240">
               <a:spcBef>
                 <a:spcPts val="768"/>
               </a:spcBef>
@@ -6003,8 +5960,7 @@
                 <a:srgbClr val="000000"/>
               </a:buClr>
               <a:buSzPct val="45000"/>
-              <a:buFont typeface=""/>
-              <a:buChar char="_x0000_"/>
+              <a:buNone/>
             </a:pPr>
             <a:r>
               <a:rPr lang="en-US" sz="3200" b="0" u="none" strike="noStrike">
@@ -6028,7 +5984,7 @@
             </a:endParaRPr>
           </a:p>
           <a:p>
-            <a:pPr marL="417240" indent="-417240" rtl="1">
+            <a:pPr marL="417240" indent="-417240">
               <a:spcBef>
                 <a:spcPts val="768"/>
               </a:spcBef>
@@ -6036,8 +5992,7 @@
                 <a:srgbClr val="000000"/>
               </a:buClr>
               <a:buSzPct val="45000"/>
-              <a:buFont typeface=""/>
-              <a:buChar char="_x0000_"/>
+              <a:buNone/>
             </a:pPr>
             <a:r>
               <a:rPr lang="en-US" sz="3200" b="0" u="none" strike="noStrike">
@@ -6061,7 +6016,7 @@
             </a:endParaRPr>
           </a:p>
           <a:p>
-            <a:pPr marL="417240" indent="-417240" rtl="1">
+            <a:pPr marL="417240" indent="-417240">
               <a:spcBef>
                 <a:spcPts val="768"/>
               </a:spcBef>
@@ -6069,8 +6024,7 @@
                 <a:srgbClr val="000000"/>
               </a:buClr>
               <a:buSzPct val="45000"/>
-              <a:buFont typeface=""/>
-              <a:buChar char="_x0000_"/>
+              <a:buNone/>
             </a:pPr>
             <a:r>
               <a:rPr lang="en-US" sz="3200" b="0" u="none" strike="noStrike">

--- a/experimental-error.pptx
+++ b/experimental-error.pptx
@@ -1538,7 +1538,7 @@
         <p:spPr>
           <a:xfrm>
             <a:off x="457200" y="1600200"/>
-            <a:ext cx="8229600" cy="4525920"/>
+            <a:ext cx="8229600" cy="822960"/>
           </a:xfrm>
           <a:prstGeom prst="rect">
             <a:avLst/>
@@ -1574,174 +1574,6 @@
                 <a:ea typeface="Calibri"/>
               </a:rPr>
               <a:t>Proximity (closeness) to target</a:t>
-            </a:r>
-            <a:endParaRPr lang="en-US" sz="3200" b="0" u="none" strike="noStrike">
-              <a:solidFill>
-                <a:srgbClr val="000000"/>
-              </a:solidFill>
-              <a:effectLst/>
-              <a:uFillTx/>
-              <a:latin typeface="Arial"/>
-            </a:endParaRPr>
-          </a:p>
-          <a:p>
-            <a:pPr marL="417240" indent="-417240">
-              <a:spcBef>
-                <a:spcPts val="768"/>
-              </a:spcBef>
-              <a:buClr>
-                <a:srgbClr val="000000"/>
-              </a:buClr>
-              <a:buSzPct val="45000"/>
-              <a:buNone/>
-            </a:pPr>
-            <a:r>
-              <a:rPr lang="en-US" sz="1800" b="0" u="none" strike="noStrike">
-                <a:solidFill>
-                  <a:srgbClr val="000000"/>
-                </a:solidFill>
-                <a:effectLst/>
-                <a:uFillTx/>
-                <a:latin typeface="Arial"/>
-              </a:rPr>
-              <a:t> </a:t>
-            </a:r>
-            <a:endParaRPr lang="en-US" sz="1800" b="0" u="none" strike="noStrike">
-              <a:solidFill>
-                <a:srgbClr val="000000"/>
-              </a:solidFill>
-              <a:effectLst/>
-              <a:uFillTx/>
-              <a:latin typeface="Arial"/>
-            </a:endParaRPr>
-          </a:p>
-          <a:p>
-            <a:pPr marL="417240" indent="-417240">
-              <a:spcBef>
-                <a:spcPts val="768"/>
-              </a:spcBef>
-              <a:buClr>
-                <a:srgbClr val="000000"/>
-              </a:buClr>
-              <a:buSzPct val="45000"/>
-              <a:buNone/>
-            </a:pPr>
-            <a:r>
-              <a:rPr lang="en-US" sz="1800" b="0" u="none" strike="noStrike">
-                <a:solidFill>
-                  <a:srgbClr val="000000"/>
-                </a:solidFill>
-                <a:effectLst/>
-                <a:uFillTx/>
-                <a:latin typeface="Arial"/>
-              </a:rPr>
-              <a:t> </a:t>
-            </a:r>
-            <a:endParaRPr lang="en-US" sz="1800" b="0" u="none" strike="noStrike">
-              <a:solidFill>
-                <a:srgbClr val="000000"/>
-              </a:solidFill>
-              <a:effectLst/>
-              <a:uFillTx/>
-              <a:latin typeface="Arial"/>
-            </a:endParaRPr>
-          </a:p>
-          <a:p>
-            <a:pPr marL="417240" indent="-417240">
-              <a:spcBef>
-                <a:spcPts val="768"/>
-              </a:spcBef>
-              <a:buClr>
-                <a:srgbClr val="000000"/>
-              </a:buClr>
-              <a:buSzPct val="45000"/>
-              <a:buNone/>
-            </a:pPr>
-            <a:r>
-              <a:rPr lang="en-US" sz="1800" b="0" u="none" strike="noStrike">
-                <a:solidFill>
-                  <a:srgbClr val="000000"/>
-                </a:solidFill>
-                <a:effectLst/>
-                <a:uFillTx/>
-                <a:latin typeface="Arial"/>
-              </a:rPr>
-              <a:t> </a:t>
-            </a:r>
-            <a:endParaRPr lang="en-US" sz="1800" b="0" u="none" strike="noStrike">
-              <a:solidFill>
-                <a:srgbClr val="000000"/>
-              </a:solidFill>
-              <a:effectLst/>
-              <a:uFillTx/>
-              <a:latin typeface="Arial"/>
-            </a:endParaRPr>
-          </a:p>
-          <a:p>
-            <a:pPr marL="417240" indent="-417240">
-              <a:spcBef>
-                <a:spcPts val="768"/>
-              </a:spcBef>
-              <a:buClr>
-                <a:srgbClr val="000000"/>
-              </a:buClr>
-              <a:buSzPct val="45000"/>
-              <a:buNone/>
-            </a:pPr>
-            <a:r>
-              <a:rPr lang="en-US" sz="1800" b="0" u="none" strike="noStrike">
-                <a:solidFill>
-                  <a:srgbClr val="000000"/>
-                </a:solidFill>
-                <a:effectLst/>
-                <a:uFillTx/>
-                <a:latin typeface="Arial"/>
-              </a:rPr>
-              <a:t> </a:t>
-            </a:r>
-            <a:endParaRPr lang="en-US" sz="1800" b="0" u="none" strike="noStrike">
-              <a:solidFill>
-                <a:srgbClr val="000000"/>
-              </a:solidFill>
-              <a:effectLst/>
-              <a:uFillTx/>
-              <a:latin typeface="Arial"/>
-            </a:endParaRPr>
-          </a:p>
-          <a:p>
-            <a:pPr marL="417240" indent="-417240">
-              <a:spcBef>
-                <a:spcPts val="768"/>
-              </a:spcBef>
-              <a:buClr>
-                <a:srgbClr val="000000"/>
-              </a:buClr>
-              <a:buSzPct val="45000"/>
-              <a:buNone/>
-            </a:pPr>
-            <a:r>
-              <a:rPr lang="en-US" sz="3200" b="0" u="none" strike="noStrike">
-                <a:solidFill>
-                  <a:srgbClr val="000000"/>
-                </a:solidFill>
-                <a:effectLst/>
-                <a:uFillTx/>
-                <a:latin typeface="Calibri"/>
-                <a:ea typeface="Calibri"/>
-              </a:rPr>
-              <a:t>Analyzed after data collection using </a:t>
-            </a:r>
-            <a:r>
-              <a:rPr lang="en-US" sz="3200" b="1" u="none" strike="noStrike">
-                <a:solidFill>
-                  <a:srgbClr val="000000"/>
-                </a:solidFill>
-                <a:effectLst/>
-                <a:uFillTx/>
-                <a:latin typeface="Calibri-Bold"/>
-                <a:ea typeface="Calibri-Bold"/>
-              </a:rPr>
-              <a:t>percent error</a:t>
             </a:r>
             <a:endParaRPr lang="en-US" sz="3200" b="0" u="none" strike="noStrike">
               <a:solidFill>
@@ -1778,6 +1610,36 @@
           </a:ln>
         </p:spPr>
       </p:pic>
+      <p:sp>
+        <p:nvSpPr>
+          <p:cNvPr id="44" name="TextBox 43"/>
+          <p:cNvSpPr txBox="1"/>
+          <p:nvPr/>
+        </p:nvSpPr>
+        <p:spPr>
+          <a:xfrm>
+            <a:off x="457200" y="4389120"/>
+            <a:ext cx="8229600" cy="914400"/>
+          </a:xfrm>
+          <a:prstGeom prst="rect">
+            <a:avLst/>
+          </a:prstGeom>
+          <a:noFill/>
+        </p:spPr>
+        <p:txBody>
+          <a:bodyPr wrap="none">
+            <a:spAutoFit/>
+          </a:bodyPr>
+          <a:lstStyle/>
+          <a:p>
+            <a:pPr algn="l"/>
+            <a:r>
+              <a:rPr sz="2600"/>
+              <a:t>Analyzed after data collection using percent error</a:t>
+            </a:r>
+          </a:p>
+        </p:txBody>
+      </p:sp>
     </p:spTree>
   </p:cSld>
   <mc:AlternateContent>
@@ -2458,7 +2320,7 @@
         <p:spPr>
           <a:xfrm>
             <a:off x="779400" y="1853640"/>
-            <a:ext cx="5994720" cy="1107360"/>
+            <a:ext cx="7772400" cy="1107360"/>
           </a:xfrm>
           <a:prstGeom prst="rect">
             <a:avLst/>
@@ -2469,12 +2331,12 @@
           </a:ln>
         </p:spPr>
         <p:txBody>
-          <a:bodyPr lIns="90000" tIns="45000" rIns="90000" bIns="45000" anchor="t">
+          <a:bodyPr lIns="90000" tIns="45000" rIns="90000" bIns="45000" anchor="t" wrap="none">
             <a:spAutoFit/>
           </a:bodyPr>
           <a:p>
             <a:r>
-              <a:rPr lang="en-US" sz="3270" b="0" u="none" strike="noStrike">
+              <a:rPr lang="en-US" sz="2800" b="0" u="none" strike="noStrike">
                 <a:solidFill>
                   <a:srgbClr val="1E2836"/>
                 </a:solidFill>
@@ -2519,12 +2381,12 @@
           </a:ln>
         </p:spPr>
         <p:txBody>
-          <a:bodyPr lIns="90000" tIns="45000" rIns="90000" bIns="45000" anchor="t">
+          <a:bodyPr lIns="90000" tIns="45000" rIns="90000" bIns="45000" anchor="t" wrap="none">
             <a:spAutoFit/>
           </a:bodyPr>
           <a:p>
             <a:r>
-              <a:rPr lang="en-US" sz="3070" b="0" u="none" strike="noStrike">
+              <a:rPr lang="en-US" sz="2400" b="0" u="none" strike="noStrike">
                 <a:solidFill>
                   <a:srgbClr val="1E2836"/>
                 </a:solidFill>
@@ -2539,7 +2401,7 @@
               <a:t>% error = </a:t>
             </a:r>
             <a:r>
-              <a:rPr lang="en-US" sz="3070" b="0" u="none" strike="noStrike">
+              <a:rPr lang="en-US" sz="2400" b="0" u="none" strike="noStrike">
                 <a:solidFill>
                   <a:srgbClr val="1E2836"/>
                 </a:solidFill>
